--- a/ゲーム科1年/00_前期/ゲームプログラミングⅡ/00_FPS（フレームレート）.pptx
+++ b/ゲーム科1年/00_前期/ゲームプログラミングⅡ/00_FPS（フレームレート）.pptx
@@ -271,7 +271,7 @@
           <a:p>
             <a:fld id="{E9CC885B-4903-4D54-9A93-00025F12DED9}" type="datetimeFigureOut">
               <a:rPr kumimoji="1" lang="ja-JP" altLang="en-US" smtClean="0"/>
-              <a:t>2024/9/5</a:t>
+              <a:t>2025/3/3</a:t>
             </a:fld>
             <a:endParaRPr kumimoji="1" lang="ja-JP" altLang="en-US"/>
           </a:p>
@@ -501,7 +501,7 @@
           <a:p>
             <a:fld id="{E9CC885B-4903-4D54-9A93-00025F12DED9}" type="datetimeFigureOut">
               <a:rPr kumimoji="1" lang="ja-JP" altLang="en-US" smtClean="0"/>
-              <a:t>2024/9/5</a:t>
+              <a:t>2025/3/3</a:t>
             </a:fld>
             <a:endParaRPr kumimoji="1" lang="ja-JP" altLang="en-US"/>
           </a:p>
@@ -741,7 +741,7 @@
           <a:p>
             <a:fld id="{E9CC885B-4903-4D54-9A93-00025F12DED9}" type="datetimeFigureOut">
               <a:rPr kumimoji="1" lang="ja-JP" altLang="en-US" smtClean="0"/>
-              <a:t>2024/9/5</a:t>
+              <a:t>2025/3/3</a:t>
             </a:fld>
             <a:endParaRPr kumimoji="1" lang="ja-JP" altLang="en-US"/>
           </a:p>
@@ -971,7 +971,7 @@
           <a:p>
             <a:fld id="{E9CC885B-4903-4D54-9A93-00025F12DED9}" type="datetimeFigureOut">
               <a:rPr kumimoji="1" lang="ja-JP" altLang="en-US" smtClean="0"/>
-              <a:t>2024/9/5</a:t>
+              <a:t>2025/3/3</a:t>
             </a:fld>
             <a:endParaRPr kumimoji="1" lang="ja-JP" altLang="en-US"/>
           </a:p>
@@ -1246,7 +1246,7 @@
           <a:p>
             <a:fld id="{E9CC885B-4903-4D54-9A93-00025F12DED9}" type="datetimeFigureOut">
               <a:rPr kumimoji="1" lang="ja-JP" altLang="en-US" smtClean="0"/>
-              <a:t>2024/9/5</a:t>
+              <a:t>2025/3/3</a:t>
             </a:fld>
             <a:endParaRPr kumimoji="1" lang="ja-JP" altLang="en-US"/>
           </a:p>
@@ -1575,7 +1575,7 @@
           <a:p>
             <a:fld id="{E9CC885B-4903-4D54-9A93-00025F12DED9}" type="datetimeFigureOut">
               <a:rPr kumimoji="1" lang="ja-JP" altLang="en-US" smtClean="0"/>
-              <a:t>2024/9/5</a:t>
+              <a:t>2025/3/3</a:t>
             </a:fld>
             <a:endParaRPr kumimoji="1" lang="ja-JP" altLang="en-US"/>
           </a:p>
@@ -2051,7 +2051,7 @@
           <a:p>
             <a:fld id="{E9CC885B-4903-4D54-9A93-00025F12DED9}" type="datetimeFigureOut">
               <a:rPr kumimoji="1" lang="ja-JP" altLang="en-US" smtClean="0"/>
-              <a:t>2024/9/5</a:t>
+              <a:t>2025/3/3</a:t>
             </a:fld>
             <a:endParaRPr kumimoji="1" lang="ja-JP" altLang="en-US"/>
           </a:p>
@@ -2192,7 +2192,7 @@
           <a:p>
             <a:fld id="{E9CC885B-4903-4D54-9A93-00025F12DED9}" type="datetimeFigureOut">
               <a:rPr kumimoji="1" lang="ja-JP" altLang="en-US" smtClean="0"/>
-              <a:t>2024/9/5</a:t>
+              <a:t>2025/3/3</a:t>
             </a:fld>
             <a:endParaRPr kumimoji="1" lang="ja-JP" altLang="en-US"/>
           </a:p>
@@ -2305,7 +2305,7 @@
           <a:p>
             <a:fld id="{E9CC885B-4903-4D54-9A93-00025F12DED9}" type="datetimeFigureOut">
               <a:rPr kumimoji="1" lang="ja-JP" altLang="en-US" smtClean="0"/>
-              <a:t>2024/9/5</a:t>
+              <a:t>2025/3/3</a:t>
             </a:fld>
             <a:endParaRPr kumimoji="1" lang="ja-JP" altLang="en-US"/>
           </a:p>
@@ -2648,7 +2648,7 @@
           <a:p>
             <a:fld id="{E9CC885B-4903-4D54-9A93-00025F12DED9}" type="datetimeFigureOut">
               <a:rPr kumimoji="1" lang="ja-JP" altLang="en-US" smtClean="0"/>
-              <a:t>2024/9/5</a:t>
+              <a:t>2025/3/3</a:t>
             </a:fld>
             <a:endParaRPr kumimoji="1" lang="ja-JP" altLang="en-US"/>
           </a:p>
@@ -2936,7 +2936,7 @@
           <a:p>
             <a:fld id="{E9CC885B-4903-4D54-9A93-00025F12DED9}" type="datetimeFigureOut">
               <a:rPr kumimoji="1" lang="ja-JP" altLang="en-US" smtClean="0"/>
-              <a:t>2024/9/5</a:t>
+              <a:t>2025/3/3</a:t>
             </a:fld>
             <a:endParaRPr kumimoji="1" lang="ja-JP" altLang="en-US"/>
           </a:p>
@@ -3209,7 +3209,7 @@
           <a:p>
             <a:fld id="{E9CC885B-4903-4D54-9A93-00025F12DED9}" type="datetimeFigureOut">
               <a:rPr kumimoji="1" lang="ja-JP" altLang="en-US" smtClean="0"/>
-              <a:t>2024/9/5</a:t>
+              <a:t>2025/3/3</a:t>
             </a:fld>
             <a:endParaRPr kumimoji="1" lang="ja-JP" altLang="en-US"/>
           </a:p>
@@ -3961,7 +3961,7 @@
         <p:spPr>
           <a:xfrm>
             <a:off x="567542" y="1216429"/>
-            <a:ext cx="2414444" cy="461665"/>
+            <a:ext cx="2494594" cy="461665"/>
           </a:xfrm>
           <a:prstGeom prst="rect">
             <a:avLst/>
@@ -3975,7 +3975,11 @@
           <a:lstStyle/>
           <a:p>
             <a:r>
-              <a:rPr lang="en-US" altLang="ja-JP" sz="2400" dirty="0"/>
+              <a:rPr lang="en-US" altLang="ja-JP" sz="2400" b="1" dirty="0">
+                <a:solidFill>
+                  <a:srgbClr val="FF0000"/>
+                </a:solidFill>
+              </a:rPr>
               <a:t>Main.cpp</a:t>
             </a:r>
             <a:r>
@@ -4194,7 +4198,7 @@
         <p:spPr>
           <a:xfrm>
             <a:off x="567542" y="1216429"/>
-            <a:ext cx="2414444" cy="461665"/>
+            <a:ext cx="2494594" cy="461665"/>
           </a:xfrm>
           <a:prstGeom prst="rect">
             <a:avLst/>
@@ -4208,7 +4212,11 @@
           <a:lstStyle/>
           <a:p>
             <a:r>
-              <a:rPr lang="en-US" altLang="ja-JP" sz="2400" dirty="0"/>
+              <a:rPr lang="en-US" altLang="ja-JP" sz="2400" b="1" dirty="0">
+                <a:solidFill>
+                  <a:srgbClr val="FF0000"/>
+                </a:solidFill>
+              </a:rPr>
               <a:t>Main.cpp</a:t>
             </a:r>
             <a:r>
@@ -5473,7 +5481,11 @@
           <a:lstStyle/>
           <a:p>
             <a:r>
-              <a:rPr lang="en-US" altLang="ja-JP" sz="2400" dirty="0" err="1"/>
+              <a:rPr lang="en-US" altLang="ja-JP" sz="2400" b="1" dirty="0" err="1">
+                <a:solidFill>
+                  <a:srgbClr val="FF0000"/>
+                </a:solidFill>
+              </a:rPr>
               <a:t>FPS.h</a:t>
             </a:r>
             <a:r>
@@ -5604,7 +5616,7 @@
         <p:spPr>
           <a:xfrm>
             <a:off x="567542" y="1216429"/>
-            <a:ext cx="2287806" cy="461665"/>
+            <a:ext cx="2355132" cy="461665"/>
           </a:xfrm>
           <a:prstGeom prst="rect">
             <a:avLst/>
@@ -5618,7 +5630,11 @@
           <a:lstStyle/>
           <a:p>
             <a:r>
-              <a:rPr lang="en-US" altLang="ja-JP" sz="2400" dirty="0"/>
+              <a:rPr lang="en-US" altLang="ja-JP" sz="2400" b="1" dirty="0">
+                <a:solidFill>
+                  <a:srgbClr val="FF0000"/>
+                </a:solidFill>
+              </a:rPr>
               <a:t>FPS.cpp</a:t>
             </a:r>
             <a:r>
@@ -5749,7 +5765,7 @@
         <p:spPr>
           <a:xfrm>
             <a:off x="567542" y="1216429"/>
-            <a:ext cx="2287806" cy="461665"/>
+            <a:ext cx="2355132" cy="461665"/>
           </a:xfrm>
           <a:prstGeom prst="rect">
             <a:avLst/>
@@ -5763,7 +5779,11 @@
           <a:lstStyle/>
           <a:p>
             <a:r>
-              <a:rPr lang="en-US" altLang="ja-JP" sz="2400" dirty="0"/>
+              <a:rPr lang="en-US" altLang="ja-JP" sz="2400" b="1" dirty="0">
+                <a:solidFill>
+                  <a:srgbClr val="FF0000"/>
+                </a:solidFill>
+              </a:rPr>
               <a:t>FPS.cpp</a:t>
             </a:r>
             <a:r>
@@ -5894,7 +5914,7 @@
         <p:spPr>
           <a:xfrm>
             <a:off x="567542" y="1216429"/>
-            <a:ext cx="2287806" cy="461665"/>
+            <a:ext cx="2355132" cy="461665"/>
           </a:xfrm>
           <a:prstGeom prst="rect">
             <a:avLst/>
@@ -5908,7 +5928,11 @@
           <a:lstStyle/>
           <a:p>
             <a:r>
-              <a:rPr lang="en-US" altLang="ja-JP" sz="2400" dirty="0"/>
+              <a:rPr lang="en-US" altLang="ja-JP" sz="2400" b="1" dirty="0">
+                <a:solidFill>
+                  <a:srgbClr val="FF0000"/>
+                </a:solidFill>
+              </a:rPr>
               <a:t>FPS.cpp</a:t>
             </a:r>
             <a:r>
@@ -6039,7 +6063,7 @@
         <p:spPr>
           <a:xfrm>
             <a:off x="567542" y="1216429"/>
-            <a:ext cx="2414444" cy="461665"/>
+            <a:ext cx="2494594" cy="461665"/>
           </a:xfrm>
           <a:prstGeom prst="rect">
             <a:avLst/>
@@ -6053,7 +6077,11 @@
           <a:lstStyle/>
           <a:p>
             <a:r>
-              <a:rPr lang="en-US" altLang="ja-JP" sz="2400" dirty="0"/>
+              <a:rPr lang="en-US" altLang="ja-JP" sz="2400" b="1" dirty="0">
+                <a:solidFill>
+                  <a:srgbClr val="FF0000"/>
+                </a:solidFill>
+              </a:rPr>
               <a:t>Main.cpp</a:t>
             </a:r>
             <a:r>

--- a/ゲーム科1年/00_前期/ゲームプログラミングⅡ/00_FPS（フレームレート）.pptx
+++ b/ゲーム科1年/00_前期/ゲームプログラミングⅡ/00_FPS（フレームレート）.pptx
@@ -271,7 +271,7 @@
           <a:p>
             <a:fld id="{E9CC885B-4903-4D54-9A93-00025F12DED9}" type="datetimeFigureOut">
               <a:rPr kumimoji="1" lang="ja-JP" altLang="en-US" smtClean="0"/>
-              <a:t>2025/3/3</a:t>
+              <a:t>2026/5/13</a:t>
             </a:fld>
             <a:endParaRPr kumimoji="1" lang="ja-JP" altLang="en-US"/>
           </a:p>
@@ -501,7 +501,7 @@
           <a:p>
             <a:fld id="{E9CC885B-4903-4D54-9A93-00025F12DED9}" type="datetimeFigureOut">
               <a:rPr kumimoji="1" lang="ja-JP" altLang="en-US" smtClean="0"/>
-              <a:t>2025/3/3</a:t>
+              <a:t>2026/5/13</a:t>
             </a:fld>
             <a:endParaRPr kumimoji="1" lang="ja-JP" altLang="en-US"/>
           </a:p>
@@ -741,7 +741,7 @@
           <a:p>
             <a:fld id="{E9CC885B-4903-4D54-9A93-00025F12DED9}" type="datetimeFigureOut">
               <a:rPr kumimoji="1" lang="ja-JP" altLang="en-US" smtClean="0"/>
-              <a:t>2025/3/3</a:t>
+              <a:t>2026/5/13</a:t>
             </a:fld>
             <a:endParaRPr kumimoji="1" lang="ja-JP" altLang="en-US"/>
           </a:p>
@@ -971,7 +971,7 @@
           <a:p>
             <a:fld id="{E9CC885B-4903-4D54-9A93-00025F12DED9}" type="datetimeFigureOut">
               <a:rPr kumimoji="1" lang="ja-JP" altLang="en-US" smtClean="0"/>
-              <a:t>2025/3/3</a:t>
+              <a:t>2026/5/13</a:t>
             </a:fld>
             <a:endParaRPr kumimoji="1" lang="ja-JP" altLang="en-US"/>
           </a:p>
@@ -1246,7 +1246,7 @@
           <a:p>
             <a:fld id="{E9CC885B-4903-4D54-9A93-00025F12DED9}" type="datetimeFigureOut">
               <a:rPr kumimoji="1" lang="ja-JP" altLang="en-US" smtClean="0"/>
-              <a:t>2025/3/3</a:t>
+              <a:t>2026/5/13</a:t>
             </a:fld>
             <a:endParaRPr kumimoji="1" lang="ja-JP" altLang="en-US"/>
           </a:p>
@@ -1575,7 +1575,7 @@
           <a:p>
             <a:fld id="{E9CC885B-4903-4D54-9A93-00025F12DED9}" type="datetimeFigureOut">
               <a:rPr kumimoji="1" lang="ja-JP" altLang="en-US" smtClean="0"/>
-              <a:t>2025/3/3</a:t>
+              <a:t>2026/5/13</a:t>
             </a:fld>
             <a:endParaRPr kumimoji="1" lang="ja-JP" altLang="en-US"/>
           </a:p>
@@ -2051,7 +2051,7 @@
           <a:p>
             <a:fld id="{E9CC885B-4903-4D54-9A93-00025F12DED9}" type="datetimeFigureOut">
               <a:rPr kumimoji="1" lang="ja-JP" altLang="en-US" smtClean="0"/>
-              <a:t>2025/3/3</a:t>
+              <a:t>2026/5/13</a:t>
             </a:fld>
             <a:endParaRPr kumimoji="1" lang="ja-JP" altLang="en-US"/>
           </a:p>
@@ -2192,7 +2192,7 @@
           <a:p>
             <a:fld id="{E9CC885B-4903-4D54-9A93-00025F12DED9}" type="datetimeFigureOut">
               <a:rPr kumimoji="1" lang="ja-JP" altLang="en-US" smtClean="0"/>
-              <a:t>2025/3/3</a:t>
+              <a:t>2026/5/13</a:t>
             </a:fld>
             <a:endParaRPr kumimoji="1" lang="ja-JP" altLang="en-US"/>
           </a:p>
@@ -2305,7 +2305,7 @@
           <a:p>
             <a:fld id="{E9CC885B-4903-4D54-9A93-00025F12DED9}" type="datetimeFigureOut">
               <a:rPr kumimoji="1" lang="ja-JP" altLang="en-US" smtClean="0"/>
-              <a:t>2025/3/3</a:t>
+              <a:t>2026/5/13</a:t>
             </a:fld>
             <a:endParaRPr kumimoji="1" lang="ja-JP" altLang="en-US"/>
           </a:p>
@@ -2648,7 +2648,7 @@
           <a:p>
             <a:fld id="{E9CC885B-4903-4D54-9A93-00025F12DED9}" type="datetimeFigureOut">
               <a:rPr kumimoji="1" lang="ja-JP" altLang="en-US" smtClean="0"/>
-              <a:t>2025/3/3</a:t>
+              <a:t>2026/5/13</a:t>
             </a:fld>
             <a:endParaRPr kumimoji="1" lang="ja-JP" altLang="en-US"/>
           </a:p>
@@ -2936,7 +2936,7 @@
           <a:p>
             <a:fld id="{E9CC885B-4903-4D54-9A93-00025F12DED9}" type="datetimeFigureOut">
               <a:rPr kumimoji="1" lang="ja-JP" altLang="en-US" smtClean="0"/>
-              <a:t>2025/3/3</a:t>
+              <a:t>2026/5/13</a:t>
             </a:fld>
             <a:endParaRPr kumimoji="1" lang="ja-JP" altLang="en-US"/>
           </a:p>
@@ -3209,7 +3209,7 @@
           <a:p>
             <a:fld id="{E9CC885B-4903-4D54-9A93-00025F12DED9}" type="datetimeFigureOut">
               <a:rPr kumimoji="1" lang="ja-JP" altLang="en-US" smtClean="0"/>
-              <a:t>2025/3/3</a:t>
+              <a:t>2026/5/13</a:t>
             </a:fld>
             <a:endParaRPr kumimoji="1" lang="ja-JP" altLang="en-US"/>
           </a:p>
@@ -5135,7 +5135,7 @@
         <p:spPr>
           <a:xfrm>
             <a:off x="567542" y="1216429"/>
-            <a:ext cx="9387506" cy="2677656"/>
+            <a:ext cx="8464177" cy="2677656"/>
           </a:xfrm>
           <a:prstGeom prst="rect">
             <a:avLst/>
@@ -5191,7 +5191,7 @@
             </a:r>
             <a:r>
               <a:rPr lang="ja-JP" altLang="en-US" sz="2400" dirty="0"/>
-              <a:t>やモニターでは速く、</a:t>
+              <a:t>だと速く、</a:t>
             </a:r>
             <a:endParaRPr lang="en-US" altLang="ja-JP" sz="2400" dirty="0"/>
           </a:p>
@@ -5206,7 +5206,7 @@
             </a:r>
             <a:r>
               <a:rPr lang="ja-JP" altLang="en-US" sz="2400" dirty="0"/>
-              <a:t>、モニターだと遅くなってしまいます。</a:t>
+              <a:t>だと遅くなってしまいます。</a:t>
             </a:r>
             <a:endParaRPr lang="en-US" altLang="ja-JP" sz="2400" dirty="0"/>
           </a:p>
@@ -5224,7 +5224,7 @@
             </a:r>
             <a:r>
               <a:rPr lang="ja-JP" altLang="en-US" sz="2400" dirty="0"/>
-              <a:t>の値を設定できるようにします。</a:t>
+              <a:t>を固定するようにします。</a:t>
             </a:r>
             <a:endParaRPr lang="en-US" altLang="ja-JP" sz="2400" dirty="0"/>
           </a:p>

--- a/ゲーム科1年/00_前期/ゲームプログラミングⅡ/00_FPS（フレームレート）.pptx
+++ b/ゲーム科1年/00_前期/ゲームプログラミングⅡ/00_FPS（フレームレート）.pptx
@@ -271,7 +271,7 @@
           <a:p>
             <a:fld id="{E9CC885B-4903-4D54-9A93-00025F12DED9}" type="datetimeFigureOut">
               <a:rPr kumimoji="1" lang="ja-JP" altLang="en-US" smtClean="0"/>
-              <a:t>2026/5/13</a:t>
+              <a:t>2026/6/4</a:t>
             </a:fld>
             <a:endParaRPr kumimoji="1" lang="ja-JP" altLang="en-US"/>
           </a:p>
@@ -501,7 +501,7 @@
           <a:p>
             <a:fld id="{E9CC885B-4903-4D54-9A93-00025F12DED9}" type="datetimeFigureOut">
               <a:rPr kumimoji="1" lang="ja-JP" altLang="en-US" smtClean="0"/>
-              <a:t>2026/5/13</a:t>
+              <a:t>2026/6/4</a:t>
             </a:fld>
             <a:endParaRPr kumimoji="1" lang="ja-JP" altLang="en-US"/>
           </a:p>
@@ -741,7 +741,7 @@
           <a:p>
             <a:fld id="{E9CC885B-4903-4D54-9A93-00025F12DED9}" type="datetimeFigureOut">
               <a:rPr kumimoji="1" lang="ja-JP" altLang="en-US" smtClean="0"/>
-              <a:t>2026/5/13</a:t>
+              <a:t>2026/6/4</a:t>
             </a:fld>
             <a:endParaRPr kumimoji="1" lang="ja-JP" altLang="en-US"/>
           </a:p>
@@ -971,7 +971,7 @@
           <a:p>
             <a:fld id="{E9CC885B-4903-4D54-9A93-00025F12DED9}" type="datetimeFigureOut">
               <a:rPr kumimoji="1" lang="ja-JP" altLang="en-US" smtClean="0"/>
-              <a:t>2026/5/13</a:t>
+              <a:t>2026/6/4</a:t>
             </a:fld>
             <a:endParaRPr kumimoji="1" lang="ja-JP" altLang="en-US"/>
           </a:p>
@@ -1246,7 +1246,7 @@
           <a:p>
             <a:fld id="{E9CC885B-4903-4D54-9A93-00025F12DED9}" type="datetimeFigureOut">
               <a:rPr kumimoji="1" lang="ja-JP" altLang="en-US" smtClean="0"/>
-              <a:t>2026/5/13</a:t>
+              <a:t>2026/6/4</a:t>
             </a:fld>
             <a:endParaRPr kumimoji="1" lang="ja-JP" altLang="en-US"/>
           </a:p>
@@ -1575,7 +1575,7 @@
           <a:p>
             <a:fld id="{E9CC885B-4903-4D54-9A93-00025F12DED9}" type="datetimeFigureOut">
               <a:rPr kumimoji="1" lang="ja-JP" altLang="en-US" smtClean="0"/>
-              <a:t>2026/5/13</a:t>
+              <a:t>2026/6/4</a:t>
             </a:fld>
             <a:endParaRPr kumimoji="1" lang="ja-JP" altLang="en-US"/>
           </a:p>
@@ -2051,7 +2051,7 @@
           <a:p>
             <a:fld id="{E9CC885B-4903-4D54-9A93-00025F12DED9}" type="datetimeFigureOut">
               <a:rPr kumimoji="1" lang="ja-JP" altLang="en-US" smtClean="0"/>
-              <a:t>2026/5/13</a:t>
+              <a:t>2026/6/4</a:t>
             </a:fld>
             <a:endParaRPr kumimoji="1" lang="ja-JP" altLang="en-US"/>
           </a:p>
@@ -2192,7 +2192,7 @@
           <a:p>
             <a:fld id="{E9CC885B-4903-4D54-9A93-00025F12DED9}" type="datetimeFigureOut">
               <a:rPr kumimoji="1" lang="ja-JP" altLang="en-US" smtClean="0"/>
-              <a:t>2026/5/13</a:t>
+              <a:t>2026/6/4</a:t>
             </a:fld>
             <a:endParaRPr kumimoji="1" lang="ja-JP" altLang="en-US"/>
           </a:p>
@@ -2305,7 +2305,7 @@
           <a:p>
             <a:fld id="{E9CC885B-4903-4D54-9A93-00025F12DED9}" type="datetimeFigureOut">
               <a:rPr kumimoji="1" lang="ja-JP" altLang="en-US" smtClean="0"/>
-              <a:t>2026/5/13</a:t>
+              <a:t>2026/6/4</a:t>
             </a:fld>
             <a:endParaRPr kumimoji="1" lang="ja-JP" altLang="en-US"/>
           </a:p>
@@ -2648,7 +2648,7 @@
           <a:p>
             <a:fld id="{E9CC885B-4903-4D54-9A93-00025F12DED9}" type="datetimeFigureOut">
               <a:rPr kumimoji="1" lang="ja-JP" altLang="en-US" smtClean="0"/>
-              <a:t>2026/5/13</a:t>
+              <a:t>2026/6/4</a:t>
             </a:fld>
             <a:endParaRPr kumimoji="1" lang="ja-JP" altLang="en-US"/>
           </a:p>
@@ -2936,7 +2936,7 @@
           <a:p>
             <a:fld id="{E9CC885B-4903-4D54-9A93-00025F12DED9}" type="datetimeFigureOut">
               <a:rPr kumimoji="1" lang="ja-JP" altLang="en-US" smtClean="0"/>
-              <a:t>2026/5/13</a:t>
+              <a:t>2026/6/4</a:t>
             </a:fld>
             <a:endParaRPr kumimoji="1" lang="ja-JP" altLang="en-US"/>
           </a:p>
@@ -3209,7 +3209,7 @@
           <a:p>
             <a:fld id="{E9CC885B-4903-4D54-9A93-00025F12DED9}" type="datetimeFigureOut">
               <a:rPr kumimoji="1" lang="ja-JP" altLang="en-US" smtClean="0"/>
-              <a:t>2026/5/13</a:t>
+              <a:t>2026/6/4</a:t>
             </a:fld>
             <a:endParaRPr kumimoji="1" lang="ja-JP" altLang="en-US"/>
           </a:p>
@@ -4823,7 +4823,7 @@
         <p:spPr>
           <a:xfrm>
             <a:off x="567542" y="1216429"/>
-            <a:ext cx="10362132" cy="3785652"/>
+            <a:ext cx="10362132" cy="4154984"/>
           </a:xfrm>
           <a:prstGeom prst="rect">
             <a:avLst/>
@@ -5046,6 +5046,21 @@
             <a:r>
               <a:rPr lang="ja-JP" altLang="en-US" sz="2400" dirty="0"/>
               <a:t>の場合があります。</a:t>
+            </a:r>
+            <a:endParaRPr lang="en-US" altLang="ja-JP" sz="2400" dirty="0"/>
+          </a:p>
+          <a:p>
+            <a:r>
+              <a:rPr lang="ja-JP" altLang="en-US" sz="2400" dirty="0"/>
+              <a:t>また最近は</a:t>
+            </a:r>
+            <a:r>
+              <a:rPr lang="en-US" altLang="ja-JP" sz="2400" dirty="0"/>
+              <a:t>120FPS</a:t>
+            </a:r>
+            <a:r>
+              <a:rPr lang="ja-JP" altLang="en-US" sz="2400" dirty="0"/>
+              <a:t>対応のゲームも増えつつあります。</a:t>
             </a:r>
             <a:endParaRPr lang="en-US" altLang="ja-JP" sz="2400" dirty="0"/>
           </a:p>

--- a/ゲーム科1年/00_前期/ゲームプログラミングⅡ/00_FPS（フレームレート）.pptx
+++ b/ゲーム科1年/00_前期/ゲームプログラミングⅡ/00_FPS（フレームレート）.pptx
@@ -271,7 +271,7 @@
           <a:p>
             <a:fld id="{E9CC885B-4903-4D54-9A93-00025F12DED9}" type="datetimeFigureOut">
               <a:rPr kumimoji="1" lang="ja-JP" altLang="en-US" smtClean="0"/>
-              <a:t>2026/6/4</a:t>
+              <a:t>2026/6/22</a:t>
             </a:fld>
             <a:endParaRPr kumimoji="1" lang="ja-JP" altLang="en-US"/>
           </a:p>
@@ -501,7 +501,7 @@
           <a:p>
             <a:fld id="{E9CC885B-4903-4D54-9A93-00025F12DED9}" type="datetimeFigureOut">
               <a:rPr kumimoji="1" lang="ja-JP" altLang="en-US" smtClean="0"/>
-              <a:t>2026/6/4</a:t>
+              <a:t>2026/6/22</a:t>
             </a:fld>
             <a:endParaRPr kumimoji="1" lang="ja-JP" altLang="en-US"/>
           </a:p>
@@ -741,7 +741,7 @@
           <a:p>
             <a:fld id="{E9CC885B-4903-4D54-9A93-00025F12DED9}" type="datetimeFigureOut">
               <a:rPr kumimoji="1" lang="ja-JP" altLang="en-US" smtClean="0"/>
-              <a:t>2026/6/4</a:t>
+              <a:t>2026/6/22</a:t>
             </a:fld>
             <a:endParaRPr kumimoji="1" lang="ja-JP" altLang="en-US"/>
           </a:p>
@@ -971,7 +971,7 @@
           <a:p>
             <a:fld id="{E9CC885B-4903-4D54-9A93-00025F12DED9}" type="datetimeFigureOut">
               <a:rPr kumimoji="1" lang="ja-JP" altLang="en-US" smtClean="0"/>
-              <a:t>2026/6/4</a:t>
+              <a:t>2026/6/22</a:t>
             </a:fld>
             <a:endParaRPr kumimoji="1" lang="ja-JP" altLang="en-US"/>
           </a:p>
@@ -1246,7 +1246,7 @@
           <a:p>
             <a:fld id="{E9CC885B-4903-4D54-9A93-00025F12DED9}" type="datetimeFigureOut">
               <a:rPr kumimoji="1" lang="ja-JP" altLang="en-US" smtClean="0"/>
-              <a:t>2026/6/4</a:t>
+              <a:t>2026/6/22</a:t>
             </a:fld>
             <a:endParaRPr kumimoji="1" lang="ja-JP" altLang="en-US"/>
           </a:p>
@@ -1575,7 +1575,7 @@
           <a:p>
             <a:fld id="{E9CC885B-4903-4D54-9A93-00025F12DED9}" type="datetimeFigureOut">
               <a:rPr kumimoji="1" lang="ja-JP" altLang="en-US" smtClean="0"/>
-              <a:t>2026/6/4</a:t>
+              <a:t>2026/6/22</a:t>
             </a:fld>
             <a:endParaRPr kumimoji="1" lang="ja-JP" altLang="en-US"/>
           </a:p>
@@ -2051,7 +2051,7 @@
           <a:p>
             <a:fld id="{E9CC885B-4903-4D54-9A93-00025F12DED9}" type="datetimeFigureOut">
               <a:rPr kumimoji="1" lang="ja-JP" altLang="en-US" smtClean="0"/>
-              <a:t>2026/6/4</a:t>
+              <a:t>2026/6/22</a:t>
             </a:fld>
             <a:endParaRPr kumimoji="1" lang="ja-JP" altLang="en-US"/>
           </a:p>
@@ -2192,7 +2192,7 @@
           <a:p>
             <a:fld id="{E9CC885B-4903-4D54-9A93-00025F12DED9}" type="datetimeFigureOut">
               <a:rPr kumimoji="1" lang="ja-JP" altLang="en-US" smtClean="0"/>
-              <a:t>2026/6/4</a:t>
+              <a:t>2026/6/22</a:t>
             </a:fld>
             <a:endParaRPr kumimoji="1" lang="ja-JP" altLang="en-US"/>
           </a:p>
@@ -2305,7 +2305,7 @@
           <a:p>
             <a:fld id="{E9CC885B-4903-4D54-9A93-00025F12DED9}" type="datetimeFigureOut">
               <a:rPr kumimoji="1" lang="ja-JP" altLang="en-US" smtClean="0"/>
-              <a:t>2026/6/4</a:t>
+              <a:t>2026/6/22</a:t>
             </a:fld>
             <a:endParaRPr kumimoji="1" lang="ja-JP" altLang="en-US"/>
           </a:p>
@@ -2648,7 +2648,7 @@
           <a:p>
             <a:fld id="{E9CC885B-4903-4D54-9A93-00025F12DED9}" type="datetimeFigureOut">
               <a:rPr kumimoji="1" lang="ja-JP" altLang="en-US" smtClean="0"/>
-              <a:t>2026/6/4</a:t>
+              <a:t>2026/6/22</a:t>
             </a:fld>
             <a:endParaRPr kumimoji="1" lang="ja-JP" altLang="en-US"/>
           </a:p>
@@ -2936,7 +2936,7 @@
           <a:p>
             <a:fld id="{E9CC885B-4903-4D54-9A93-00025F12DED9}" type="datetimeFigureOut">
               <a:rPr kumimoji="1" lang="ja-JP" altLang="en-US" smtClean="0"/>
-              <a:t>2026/6/4</a:t>
+              <a:t>2026/6/22</a:t>
             </a:fld>
             <a:endParaRPr kumimoji="1" lang="ja-JP" altLang="en-US"/>
           </a:p>
@@ -3209,7 +3209,7 @@
           <a:p>
             <a:fld id="{E9CC885B-4903-4D54-9A93-00025F12DED9}" type="datetimeFigureOut">
               <a:rPr kumimoji="1" lang="ja-JP" altLang="en-US" smtClean="0"/>
-              <a:t>2026/6/4</a:t>
+              <a:t>2026/6/22</a:t>
             </a:fld>
             <a:endParaRPr kumimoji="1" lang="ja-JP" altLang="en-US"/>
           </a:p>
@@ -4823,7 +4823,7 @@
         <p:spPr>
           <a:xfrm>
             <a:off x="567542" y="1216429"/>
-            <a:ext cx="10362132" cy="4154984"/>
+            <a:ext cx="10362132" cy="3416320"/>
           </a:xfrm>
           <a:prstGeom prst="rect">
             <a:avLst/>
@@ -4906,63 +4906,9 @@
             <a:endParaRPr kumimoji="1" lang="en-US" altLang="ja-JP" sz="2400" dirty="0"/>
           </a:p>
           <a:p>
-            <a:endParaRPr lang="en-US" altLang="ja-JP" sz="2400" dirty="0"/>
-          </a:p>
-          <a:p>
-            <a:r>
-              <a:rPr kumimoji="1" lang="ja-JP" altLang="en-US" sz="2400" dirty="0"/>
-              <a:t>通常、ゲームは</a:t>
-            </a:r>
-            <a:r>
-              <a:rPr kumimoji="1" lang="en-US" altLang="ja-JP" sz="2400" b="1" dirty="0">
-                <a:solidFill>
-                  <a:srgbClr val="FF0000"/>
-                </a:solidFill>
-              </a:rPr>
-              <a:t>60FPS</a:t>
-            </a:r>
-            <a:r>
-              <a:rPr kumimoji="1" lang="ja-JP" altLang="en-US" sz="2400" dirty="0"/>
-              <a:t>（</a:t>
-            </a:r>
-            <a:r>
-              <a:rPr kumimoji="1" lang="en-US" altLang="ja-JP" sz="2400" dirty="0"/>
-              <a:t>1</a:t>
-            </a:r>
-            <a:r>
-              <a:rPr kumimoji="1" lang="ja-JP" altLang="en-US" sz="2400" dirty="0"/>
-              <a:t>秒間に</a:t>
-            </a:r>
-            <a:r>
-              <a:rPr kumimoji="1" lang="en-US" altLang="ja-JP" sz="2400" dirty="0"/>
-              <a:t>60</a:t>
-            </a:r>
-            <a:r>
-              <a:rPr kumimoji="1" lang="ja-JP" altLang="en-US" sz="2400" dirty="0"/>
-              <a:t>フレーム）もしくは</a:t>
-            </a:r>
-            <a:endParaRPr kumimoji="1" lang="en-US" altLang="ja-JP" sz="2400" dirty="0"/>
-          </a:p>
-          <a:p>
-            <a:r>
-              <a:rPr lang="en-US" altLang="ja-JP" sz="2400" b="1" dirty="0">
-                <a:solidFill>
-                  <a:srgbClr val="FF0000"/>
-                </a:solidFill>
-              </a:rPr>
-              <a:t>30FPS</a:t>
-            </a:r>
             <a:r>
               <a:rPr lang="ja-JP" altLang="en-US" sz="2400" dirty="0"/>
-              <a:t>（</a:t>
-            </a:r>
-            <a:r>
-              <a:rPr lang="en-US" altLang="ja-JP" sz="2400" dirty="0"/>
-              <a:t>1</a:t>
-            </a:r>
-            <a:r>
-              <a:rPr lang="ja-JP" altLang="en-US" sz="2400" dirty="0"/>
-              <a:t>秒間に</a:t>
+              <a:t>ゲームのフレームレートは</a:t>
             </a:r>
             <a:r>
               <a:rPr lang="en-US" altLang="ja-JP" sz="2400" dirty="0"/>
@@ -4970,7 +4916,15 @@
             </a:r>
             <a:r>
               <a:rPr lang="ja-JP" altLang="en-US" sz="2400" dirty="0"/>
-              <a:t>フレーム）で動いています。</a:t>
+              <a:t>～</a:t>
+            </a:r>
+            <a:r>
+              <a:rPr lang="en-US" altLang="ja-JP" sz="2400" dirty="0"/>
+              <a:t>120FPS</a:t>
+            </a:r>
+            <a:r>
+              <a:rPr lang="ja-JP" altLang="en-US" sz="2400" dirty="0"/>
+              <a:t>になります。</a:t>
             </a:r>
             <a:endParaRPr lang="en-US" altLang="ja-JP" sz="2400" dirty="0"/>
           </a:p>
@@ -5014,7 +4968,7 @@
             </a:r>
             <a:r>
               <a:rPr lang="ja-JP" altLang="en-US" sz="2400" dirty="0"/>
-              <a:t>動きや判定で勝敗が決まるものは</a:t>
+              <a:t>動きや判定で勝敗が決まるものは最低</a:t>
             </a:r>
             <a:r>
               <a:rPr lang="en-US" altLang="ja-JP" sz="2400" dirty="0"/>
@@ -6176,12 +6130,24 @@
               <a:t>システム的なものなので</a:t>
             </a:r>
             <a:r>
-              <a:rPr lang="en-US" altLang="ja-JP" sz="2400" dirty="0" err="1"/>
+              <a:rPr lang="en-US" altLang="ja-JP" sz="2400" b="1" dirty="0" err="1">
+                <a:solidFill>
+                  <a:srgbClr val="0070C0"/>
+                </a:solidFill>
+              </a:rPr>
               <a:t>GameInit</a:t>
             </a:r>
             <a:r>
+              <a:rPr lang="ja-JP" altLang="en-US" sz="2400" b="1" dirty="0">
+                <a:solidFill>
+                  <a:srgbClr val="0070C0"/>
+                </a:solidFill>
+              </a:rPr>
+              <a:t>関数</a:t>
+            </a:r>
+            <a:r>
               <a:rPr lang="ja-JP" altLang="en-US" sz="2400" dirty="0"/>
-              <a:t>関数の中では呼びませんでした。</a:t>
+              <a:t>の中では呼びませんでした。</a:t>
             </a:r>
             <a:endParaRPr lang="en-US" altLang="ja-JP" sz="2400" dirty="0"/>
           </a:p>

--- a/ゲーム科1年/00_前期/ゲームプログラミングⅡ/00_FPS（フレームレート）.pptx
+++ b/ゲーム科1年/00_前期/ゲームプログラミングⅡ/00_FPS（フレームレート）.pptx
@@ -271,7 +271,7 @@
           <a:p>
             <a:fld id="{E9CC885B-4903-4D54-9A93-00025F12DED9}" type="datetimeFigureOut">
               <a:rPr kumimoji="1" lang="ja-JP" altLang="en-US" smtClean="0"/>
-              <a:t>2026/6/22</a:t>
+              <a:t>2026/6/24</a:t>
             </a:fld>
             <a:endParaRPr kumimoji="1" lang="ja-JP" altLang="en-US"/>
           </a:p>
@@ -501,7 +501,7 @@
           <a:p>
             <a:fld id="{E9CC885B-4903-4D54-9A93-00025F12DED9}" type="datetimeFigureOut">
               <a:rPr kumimoji="1" lang="ja-JP" altLang="en-US" smtClean="0"/>
-              <a:t>2026/6/22</a:t>
+              <a:t>2026/6/24</a:t>
             </a:fld>
             <a:endParaRPr kumimoji="1" lang="ja-JP" altLang="en-US"/>
           </a:p>
@@ -741,7 +741,7 @@
           <a:p>
             <a:fld id="{E9CC885B-4903-4D54-9A93-00025F12DED9}" type="datetimeFigureOut">
               <a:rPr kumimoji="1" lang="ja-JP" altLang="en-US" smtClean="0"/>
-              <a:t>2026/6/22</a:t>
+              <a:t>2026/6/24</a:t>
             </a:fld>
             <a:endParaRPr kumimoji="1" lang="ja-JP" altLang="en-US"/>
           </a:p>
@@ -971,7 +971,7 @@
           <a:p>
             <a:fld id="{E9CC885B-4903-4D54-9A93-00025F12DED9}" type="datetimeFigureOut">
               <a:rPr kumimoji="1" lang="ja-JP" altLang="en-US" smtClean="0"/>
-              <a:t>2026/6/22</a:t>
+              <a:t>2026/6/24</a:t>
             </a:fld>
             <a:endParaRPr kumimoji="1" lang="ja-JP" altLang="en-US"/>
           </a:p>
@@ -1246,7 +1246,7 @@
           <a:p>
             <a:fld id="{E9CC885B-4903-4D54-9A93-00025F12DED9}" type="datetimeFigureOut">
               <a:rPr kumimoji="1" lang="ja-JP" altLang="en-US" smtClean="0"/>
-              <a:t>2026/6/22</a:t>
+              <a:t>2026/6/24</a:t>
             </a:fld>
             <a:endParaRPr kumimoji="1" lang="ja-JP" altLang="en-US"/>
           </a:p>
@@ -1575,7 +1575,7 @@
           <a:p>
             <a:fld id="{E9CC885B-4903-4D54-9A93-00025F12DED9}" type="datetimeFigureOut">
               <a:rPr kumimoji="1" lang="ja-JP" altLang="en-US" smtClean="0"/>
-              <a:t>2026/6/22</a:t>
+              <a:t>2026/6/24</a:t>
             </a:fld>
             <a:endParaRPr kumimoji="1" lang="ja-JP" altLang="en-US"/>
           </a:p>
@@ -2051,7 +2051,7 @@
           <a:p>
             <a:fld id="{E9CC885B-4903-4D54-9A93-00025F12DED9}" type="datetimeFigureOut">
               <a:rPr kumimoji="1" lang="ja-JP" altLang="en-US" smtClean="0"/>
-              <a:t>2026/6/22</a:t>
+              <a:t>2026/6/24</a:t>
             </a:fld>
             <a:endParaRPr kumimoji="1" lang="ja-JP" altLang="en-US"/>
           </a:p>
@@ -2192,7 +2192,7 @@
           <a:p>
             <a:fld id="{E9CC885B-4903-4D54-9A93-00025F12DED9}" type="datetimeFigureOut">
               <a:rPr kumimoji="1" lang="ja-JP" altLang="en-US" smtClean="0"/>
-              <a:t>2026/6/22</a:t>
+              <a:t>2026/6/24</a:t>
             </a:fld>
             <a:endParaRPr kumimoji="1" lang="ja-JP" altLang="en-US"/>
           </a:p>
@@ -2305,7 +2305,7 @@
           <a:p>
             <a:fld id="{E9CC885B-4903-4D54-9A93-00025F12DED9}" type="datetimeFigureOut">
               <a:rPr kumimoji="1" lang="ja-JP" altLang="en-US" smtClean="0"/>
-              <a:t>2026/6/22</a:t>
+              <a:t>2026/6/24</a:t>
             </a:fld>
             <a:endParaRPr kumimoji="1" lang="ja-JP" altLang="en-US"/>
           </a:p>
@@ -2648,7 +2648,7 @@
           <a:p>
             <a:fld id="{E9CC885B-4903-4D54-9A93-00025F12DED9}" type="datetimeFigureOut">
               <a:rPr kumimoji="1" lang="ja-JP" altLang="en-US" smtClean="0"/>
-              <a:t>2026/6/22</a:t>
+              <a:t>2026/6/24</a:t>
             </a:fld>
             <a:endParaRPr kumimoji="1" lang="ja-JP" altLang="en-US"/>
           </a:p>
@@ -2936,7 +2936,7 @@
           <a:p>
             <a:fld id="{E9CC885B-4903-4D54-9A93-00025F12DED9}" type="datetimeFigureOut">
               <a:rPr kumimoji="1" lang="ja-JP" altLang="en-US" smtClean="0"/>
-              <a:t>2026/6/22</a:t>
+              <a:t>2026/6/24</a:t>
             </a:fld>
             <a:endParaRPr kumimoji="1" lang="ja-JP" altLang="en-US"/>
           </a:p>
@@ -3209,7 +3209,7 @@
           <a:p>
             <a:fld id="{E9CC885B-4903-4D54-9A93-00025F12DED9}" type="datetimeFigureOut">
               <a:rPr kumimoji="1" lang="ja-JP" altLang="en-US" smtClean="0"/>
-              <a:t>2026/6/22</a:t>
+              <a:t>2026/6/24</a:t>
             </a:fld>
             <a:endParaRPr kumimoji="1" lang="ja-JP" altLang="en-US"/>
           </a:p>
@@ -4823,7 +4823,7 @@
         <p:spPr>
           <a:xfrm>
             <a:off x="567542" y="1216429"/>
-            <a:ext cx="10362132" cy="3416320"/>
+            <a:ext cx="10362132" cy="3785652"/>
           </a:xfrm>
           <a:prstGeom prst="rect">
             <a:avLst/>
@@ -5015,6 +5015,21 @@
             <a:r>
               <a:rPr lang="ja-JP" altLang="en-US" sz="2400" dirty="0"/>
               <a:t>対応のゲームも増えつつあります。</a:t>
+            </a:r>
+            <a:endParaRPr lang="en-US" altLang="ja-JP" sz="2400" dirty="0"/>
+          </a:p>
+          <a:p>
+            <a:r>
+              <a:rPr lang="ja-JP" altLang="en-US" sz="2400" dirty="0"/>
+              <a:t>もちろん</a:t>
+            </a:r>
+            <a:r>
+              <a:rPr lang="en-US" altLang="ja-JP" sz="2400" dirty="0"/>
+              <a:t>FPS</a:t>
+            </a:r>
+            <a:r>
+              <a:rPr lang="ja-JP" altLang="en-US" sz="2400" dirty="0"/>
+              <a:t>が高いほど、ぬるぬる動いて綺麗です。</a:t>
             </a:r>
             <a:endParaRPr lang="en-US" altLang="ja-JP" sz="2400" dirty="0"/>
           </a:p>
